--- a/docs/parking_chatbot_stage2.pptx
+++ b/docs/parking_chatbot_stage2.pptx
@@ -5115,7 +5115,7 @@
                           </a:solidFill>
                           <a:latin typeface="Calibri"/>
                         </a:rPr>
-                        <a:t>Slide 3</a:t>
+                        <a:t>Slides 4 and 5</a:t>
                       </a:r>
                     </a:p>
                   </a:txBody>
